--- a/assets/ppt/codegen/ssaform3.pptx
+++ b/assets/ppt/codegen/ssaform3.pptx
@@ -258,7 +258,7 @@
             <a:fld id="{2A2B9AA4-819F-8549-A06A-E1B5D9D61F62}" type="datetimeFigureOut">
               <a:rPr lang="en-US" smtClean="0"/>
               <a:pPr/>
-              <a:t>11/16/20</a:t>
+              <a:t>7/16/25</a:t>
             </a:fld>
             <a:endParaRPr lang="en-US"/>
           </a:p>
@@ -2177,7 +2177,7 @@
           <a:p>
             <a:fld id="{37508BEE-B66E-5E46-B50F-23B30D56323F}" type="datetime1">
               <a:rPr lang="en-CA" smtClean="0"/>
-              <a:t>2020-11-16</a:t>
+              <a:t>2025-07-16</a:t>
             </a:fld>
             <a:endParaRPr lang="en-US"/>
           </a:p>
@@ -2375,7 +2375,7 @@
           <a:p>
             <a:fld id="{94ED5F46-E862-7041-B839-1084A839C514}" type="datetime1">
               <a:rPr lang="en-CA" smtClean="0"/>
-              <a:t>2020-11-16</a:t>
+              <a:t>2025-07-16</a:t>
             </a:fld>
             <a:endParaRPr lang="en-US"/>
           </a:p>
@@ -2583,7 +2583,7 @@
           <a:p>
             <a:fld id="{A0755934-2EEA-454B-B47B-39481B16D93C}" type="datetime1">
               <a:rPr lang="en-CA" smtClean="0"/>
-              <a:t>2020-11-16</a:t>
+              <a:t>2025-07-16</a:t>
             </a:fld>
             <a:endParaRPr lang="en-US"/>
           </a:p>
@@ -3646,7 +3646,7 @@
           <a:p>
             <a:fld id="{33CDF6D5-475A-F046-87CA-412EB71D7141}" type="datetime1">
               <a:rPr lang="en-CA" smtClean="0"/>
-              <a:t>2020-11-16</a:t>
+              <a:t>2025-07-16</a:t>
             </a:fld>
             <a:endParaRPr/>
           </a:p>
@@ -4062,7 +4062,7 @@
           <a:p>
             <a:fld id="{BD806BE7-D4FF-0747-A46D-9D28D6793F9A}" type="datetime1">
               <a:rPr lang="en-CA" smtClean="0"/>
-              <a:t>2020-11-16</a:t>
+              <a:t>2025-07-16</a:t>
             </a:fld>
             <a:endParaRPr lang="en-US"/>
           </a:p>
@@ -4337,7 +4337,7 @@
           <a:p>
             <a:fld id="{FC112D8A-ADE8-E648-9A51-673455F77FA4}" type="datetime1">
               <a:rPr lang="en-CA" smtClean="0"/>
-              <a:t>2020-11-16</a:t>
+              <a:t>2025-07-16</a:t>
             </a:fld>
             <a:endParaRPr lang="en-US"/>
           </a:p>
@@ -4602,7 +4602,7 @@
           <a:p>
             <a:fld id="{A1C4D21D-FE66-404B-9D48-8813A41FDE83}" type="datetime1">
               <a:rPr lang="en-CA" smtClean="0"/>
-              <a:t>2020-11-16</a:t>
+              <a:t>2025-07-16</a:t>
             </a:fld>
             <a:endParaRPr lang="en-US"/>
           </a:p>
@@ -5014,7 +5014,7 @@
           <a:p>
             <a:fld id="{BC43913A-9187-9E4F-99AD-E5F9D3D715A1}" type="datetime1">
               <a:rPr lang="en-CA" smtClean="0"/>
-              <a:t>2020-11-16</a:t>
+              <a:t>2025-07-16</a:t>
             </a:fld>
             <a:endParaRPr lang="en-US"/>
           </a:p>
@@ -5155,7 +5155,7 @@
           <a:p>
             <a:fld id="{D640FCF0-750B-2849-A907-F64332DB8FEE}" type="datetime1">
               <a:rPr lang="en-CA" smtClean="0"/>
-              <a:t>2020-11-16</a:t>
+              <a:t>2025-07-16</a:t>
             </a:fld>
             <a:endParaRPr lang="en-US"/>
           </a:p>
@@ -5268,7 +5268,7 @@
           <a:p>
             <a:fld id="{C84DF663-3970-9B45-8274-AA8FABDA274B}" type="datetime1">
               <a:rPr lang="en-CA" smtClean="0"/>
-              <a:t>2020-11-16</a:t>
+              <a:t>2025-07-16</a:t>
             </a:fld>
             <a:endParaRPr lang="en-US"/>
           </a:p>
@@ -5579,7 +5579,7 @@
           <a:p>
             <a:fld id="{2EE809A3-0E53-524E-A233-B12C5DA91D99}" type="datetime1">
               <a:rPr lang="en-CA" smtClean="0"/>
-              <a:t>2020-11-16</a:t>
+              <a:t>2025-07-16</a:t>
             </a:fld>
             <a:endParaRPr lang="en-US"/>
           </a:p>
@@ -5867,7 +5867,7 @@
           <a:p>
             <a:fld id="{CBAFDF68-DD51-514E-B179-E22080947065}" type="datetime1">
               <a:rPr lang="en-CA" smtClean="0"/>
-              <a:t>2020-11-16</a:t>
+              <a:t>2025-07-16</a:t>
             </a:fld>
             <a:endParaRPr lang="en-US"/>
           </a:p>
@@ -6109,7 +6109,7 @@
           <a:p>
             <a:fld id="{CFB5B512-1C0B-5F4A-B1D8-07EED328189A}" type="datetime1">
               <a:rPr lang="en-CA" smtClean="0"/>
-              <a:t>2020-11-16</a:t>
+              <a:t>2025-07-16</a:t>
             </a:fld>
             <a:endParaRPr lang="en-US" dirty="0"/>
           </a:p>
@@ -7936,7 +7936,7 @@
         <p:spPr>
           <a:xfrm>
             <a:off x="283268" y="1892320"/>
-            <a:ext cx="1319622" cy="2031325"/>
+            <a:ext cx="1467736" cy="1754326"/>
           </a:xfrm>
           <a:prstGeom prst="rect">
             <a:avLst/>
